--- a/Data Structures/Data Structures.PPTX
+++ b/Data Structures/Data Structures.PPTX
@@ -6,7 +6,8 @@
   </p:sldMasterIdLst>
   <p:sldIdLst>
     <p:sldId id="256" r:id="rId2"/>
-    <p:sldId id="257" r:id="rId3"/>
+    <p:sldId id="258" r:id="rId3"/>
+    <p:sldId id="257" r:id="rId4"/>
   </p:sldIdLst>
   <p:sldSz cx="12192000" cy="6858000"/>
   <p:notesSz cx="6858000" cy="9144000"/>
@@ -105,6 +106,11 @@
       </a:defRPr>
     </a:lvl9pPr>
   </p:defaultTextStyle>
+  <p:extLst>
+    <p:ext uri="{EFAFB233-063F-42B5-8137-9DF3F51BA10A}">
+      <p15:sldGuideLst xmlns:p15="http://schemas.microsoft.com/office/powerpoint/2012/main"/>
+    </p:ext>
+  </p:extLst>
 </p:presentation>
 </file>
 
@@ -3812,11 +3818,17 @@
             <p:ph type="ctrTitle"/>
           </p:nvPr>
         </p:nvSpPr>
-        <p:spPr/>
-        <p:txBody>
-          <a:bodyPr/>
-          <a:lstStyle/>
-          <a:p>
+        <p:spPr>
+          <a:xfrm>
+            <a:off x="1097280" y="758952"/>
+            <a:ext cx="10058400" cy="3034450"/>
+          </a:xfrm>
+        </p:spPr>
+        <p:txBody>
+          <a:bodyPr/>
+          <a:lstStyle/>
+          <a:p>
+            <a:pPr algn="ctr"/>
             <a:r>
               <a:rPr lang="en-US" dirty="0"/>
               <a:t>Java Data Structures </a:t>
@@ -3879,6 +3891,224 @@
           <a:chExt cx="0" cy="0"/>
         </a:xfrm>
       </p:grpSpPr>
+      <p:sp>
+        <p:nvSpPr>
+          <p:cNvPr id="3" name="TextBox 2">
+            <a:extLst>
+              <a:ext uri="{FF2B5EF4-FFF2-40B4-BE49-F238E27FC236}">
+                <a16:creationId xmlns:a16="http://schemas.microsoft.com/office/drawing/2014/main" id="{692962B6-ECA1-6C10-C8C9-6A10004A6373}"/>
+              </a:ext>
+            </a:extLst>
+          </p:cNvPr>
+          <p:cNvSpPr txBox="1"/>
+          <p:nvPr/>
+        </p:nvSpPr>
+        <p:spPr>
+          <a:xfrm>
+            <a:off x="3047246" y="367595"/>
+            <a:ext cx="6097508" cy="646331"/>
+          </a:xfrm>
+          <a:prstGeom prst="rect">
+            <a:avLst/>
+          </a:prstGeom>
+          <a:noFill/>
+        </p:spPr>
+        <p:txBody>
+          <a:bodyPr wrap="square">
+            <a:spAutoFit/>
+          </a:bodyPr>
+          <a:lstStyle/>
+          <a:p>
+            <a:pPr algn="ctr"/>
+            <a:r>
+              <a:rPr lang="en-US" sz="3600" dirty="0"/>
+              <a:t>Java Data Structures </a:t>
+            </a:r>
+          </a:p>
+        </p:txBody>
+      </p:sp>
+      <p:sp>
+        <p:nvSpPr>
+          <p:cNvPr id="4" name="TextBox 3">
+            <a:extLst>
+              <a:ext uri="{FF2B5EF4-FFF2-40B4-BE49-F238E27FC236}">
+                <a16:creationId xmlns:a16="http://schemas.microsoft.com/office/drawing/2014/main" id="{13475497-719F-6209-6981-BF64A928F0D6}"/>
+              </a:ext>
+            </a:extLst>
+          </p:cNvPr>
+          <p:cNvSpPr txBox="1"/>
+          <p:nvPr/>
+        </p:nvSpPr>
+        <p:spPr>
+          <a:xfrm>
+            <a:off x="790846" y="1568112"/>
+            <a:ext cx="10610307" cy="1692771"/>
+          </a:xfrm>
+          <a:prstGeom prst="rect">
+            <a:avLst/>
+          </a:prstGeom>
+          <a:noFill/>
+        </p:spPr>
+        <p:txBody>
+          <a:bodyPr wrap="square" rtlCol="0">
+            <a:spAutoFit/>
+          </a:bodyPr>
+          <a:lstStyle/>
+          <a:p>
+            <a:r>
+              <a:rPr lang="en-US" sz="2800" dirty="0"/>
+              <a:t>Primitive Data Types:</a:t>
+            </a:r>
+          </a:p>
+          <a:p>
+            <a:r>
+              <a:rPr lang="en-US" sz="2400" dirty="0"/>
+              <a:t>	These types store simple values directly in memory and have high performance. These types are divided into numeric and non‑numeric categories.</a:t>
+            </a:r>
+          </a:p>
+          <a:p>
+            <a:endParaRPr lang="en-US" sz="2800" dirty="0"/>
+          </a:p>
+        </p:txBody>
+      </p:sp>
+    </p:spTree>
+    <p:extLst>
+      <p:ext uri="{BB962C8B-B14F-4D97-AF65-F5344CB8AC3E}">
+        <p14:creationId xmlns:p14="http://schemas.microsoft.com/office/powerpoint/2010/main" val="781456201"/>
+      </p:ext>
+    </p:extLst>
+  </p:cSld>
+  <p:clrMapOvr>
+    <a:masterClrMapping/>
+  </p:clrMapOvr>
+</p:sld>
+</file>
+
+<file path=ppt/slides/slide3.xml><?xml version="1.0" encoding="utf-8"?>
+<p:sld xmlns:a="http://schemas.openxmlformats.org/drawingml/2006/main" xmlns:r="http://schemas.openxmlformats.org/officeDocument/2006/relationships" xmlns:p="http://schemas.openxmlformats.org/presentationml/2006/main">
+  <p:cSld>
+    <p:spTree>
+      <p:nvGrpSpPr>
+        <p:cNvPr id="1" name=""/>
+        <p:cNvGrpSpPr/>
+        <p:nvPr/>
+      </p:nvGrpSpPr>
+      <p:grpSpPr>
+        <a:xfrm>
+          <a:off x="0" y="0"/>
+          <a:ext cx="0" cy="0"/>
+          <a:chOff x="0" y="0"/>
+          <a:chExt cx="0" cy="0"/>
+        </a:xfrm>
+      </p:grpSpPr>
+      <p:sp>
+        <p:nvSpPr>
+          <p:cNvPr id="2" name="TextBox 1">
+            <a:extLst>
+              <a:ext uri="{FF2B5EF4-FFF2-40B4-BE49-F238E27FC236}">
+                <a16:creationId xmlns:a16="http://schemas.microsoft.com/office/drawing/2014/main" id="{7A6C5E35-F94E-A381-ADD5-E72D42CC277A}"/>
+              </a:ext>
+            </a:extLst>
+          </p:cNvPr>
+          <p:cNvSpPr txBox="1"/>
+          <p:nvPr/>
+        </p:nvSpPr>
+        <p:spPr>
+          <a:xfrm>
+            <a:off x="4213412" y="294148"/>
+            <a:ext cx="3765176" cy="584775"/>
+          </a:xfrm>
+          <a:prstGeom prst="rect">
+            <a:avLst/>
+          </a:prstGeom>
+          <a:noFill/>
+        </p:spPr>
+        <p:txBody>
+          <a:bodyPr wrap="square" rtlCol="0">
+            <a:spAutoFit/>
+          </a:bodyPr>
+          <a:lstStyle/>
+          <a:p>
+            <a:pPr algn="ctr"/>
+            <a:r>
+              <a:rPr lang="en-US" sz="3200" dirty="0"/>
+              <a:t>Primitive Data Types</a:t>
+            </a:r>
+          </a:p>
+        </p:txBody>
+      </p:sp>
+      <p:sp>
+        <p:nvSpPr>
+          <p:cNvPr id="3" name="TextBox 2">
+            <a:extLst>
+              <a:ext uri="{FF2B5EF4-FFF2-40B4-BE49-F238E27FC236}">
+                <a16:creationId xmlns:a16="http://schemas.microsoft.com/office/drawing/2014/main" id="{EF4E1B50-100F-F067-3DFF-251BB81CD81B}"/>
+              </a:ext>
+            </a:extLst>
+          </p:cNvPr>
+          <p:cNvSpPr txBox="1"/>
+          <p:nvPr/>
+        </p:nvSpPr>
+        <p:spPr>
+          <a:xfrm>
+            <a:off x="0" y="1123367"/>
+            <a:ext cx="6096000" cy="461665"/>
+          </a:xfrm>
+          <a:prstGeom prst="rect">
+            <a:avLst/>
+          </a:prstGeom>
+          <a:noFill/>
+        </p:spPr>
+        <p:txBody>
+          <a:bodyPr wrap="square" rtlCol="0">
+            <a:spAutoFit/>
+          </a:bodyPr>
+          <a:lstStyle/>
+          <a:p>
+            <a:pPr algn="ctr"/>
+            <a:r>
+              <a:rPr lang="en-US" sz="2400" dirty="0"/>
+              <a:t>Numerical primitive data types </a:t>
+            </a:r>
+          </a:p>
+        </p:txBody>
+      </p:sp>
+      <p:sp>
+        <p:nvSpPr>
+          <p:cNvPr id="4" name="TextBox 3">
+            <a:extLst>
+              <a:ext uri="{FF2B5EF4-FFF2-40B4-BE49-F238E27FC236}">
+                <a16:creationId xmlns:a16="http://schemas.microsoft.com/office/drawing/2014/main" id="{8D43265B-2D04-BE64-39EE-F9412CA43C6A}"/>
+              </a:ext>
+            </a:extLst>
+          </p:cNvPr>
+          <p:cNvSpPr txBox="1"/>
+          <p:nvPr/>
+        </p:nvSpPr>
+        <p:spPr>
+          <a:xfrm>
+            <a:off x="6096000" y="1123367"/>
+            <a:ext cx="6096000" cy="461665"/>
+          </a:xfrm>
+          <a:prstGeom prst="rect">
+            <a:avLst/>
+          </a:prstGeom>
+          <a:noFill/>
+        </p:spPr>
+        <p:txBody>
+          <a:bodyPr wrap="square" rtlCol="0">
+            <a:spAutoFit/>
+          </a:bodyPr>
+          <a:lstStyle/>
+          <a:p>
+            <a:pPr algn="ctr"/>
+            <a:r>
+              <a:rPr lang="en-US" sz="2400" dirty="0"/>
+              <a:t>Non-numerical primitive data types </a:t>
+            </a:r>
+          </a:p>
+        </p:txBody>
+      </p:sp>
     </p:spTree>
     <p:extLst>
       <p:ext uri="{BB962C8B-B14F-4D97-AF65-F5344CB8AC3E}">

--- a/Data Structures/Data Structures.PPTX
+++ b/Data Structures/Data Structures.PPTX
@@ -7,7 +7,8 @@
   <p:sldIdLst>
     <p:sldId id="256" r:id="rId2"/>
     <p:sldId id="258" r:id="rId3"/>
-    <p:sldId id="257" r:id="rId4"/>
+    <p:sldId id="259" r:id="rId4"/>
+    <p:sldId id="257" r:id="rId5"/>
   </p:sldIdLst>
   <p:sldSz cx="12192000" cy="6858000"/>
   <p:notesSz cx="6858000" cy="9144000"/>
@@ -3922,7 +3923,7 @@
             <a:pPr algn="ctr"/>
             <a:r>
               <a:rPr lang="en-US" sz="3600" dirty="0"/>
-              <a:t>Java Data Structures </a:t>
+              <a:t>Data Structures </a:t>
             </a:r>
           </a:p>
         </p:txBody>
@@ -3941,8 +3942,8 @@
         </p:nvSpPr>
         <p:spPr>
           <a:xfrm>
-            <a:off x="790846" y="1568112"/>
-            <a:ext cx="10610307" cy="1692771"/>
+            <a:off x="790846" y="1628507"/>
+            <a:ext cx="10610307" cy="3600986"/>
           </a:xfrm>
           <a:prstGeom prst="rect">
             <a:avLst/>
@@ -3956,14 +3957,38 @@
           <a:lstStyle/>
           <a:p>
             <a:r>
-              <a:rPr lang="en-US" sz="2800" dirty="0"/>
-              <a:t>Primitive Data Types:</a:t>
+              <a:rPr lang="en-US" sz="2800" b="1" dirty="0"/>
+              <a:t>Primitive Types:</a:t>
             </a:r>
           </a:p>
           <a:p>
             <a:r>
               <a:rPr lang="en-US" sz="2400" dirty="0"/>
               <a:t>	These types store simple values directly in memory and have high performance. These types are divided into numeric and non‑numeric categories.</a:t>
+            </a:r>
+            <a:endParaRPr lang="fa-IR" sz="2400" dirty="0"/>
+          </a:p>
+          <a:p>
+            <a:endParaRPr lang="fa-IR" sz="2400" dirty="0"/>
+          </a:p>
+          <a:p>
+            <a:endParaRPr lang="fa-IR" sz="2400" dirty="0"/>
+          </a:p>
+          <a:p>
+            <a:r>
+              <a:rPr lang="en-US" sz="2800" b="1" dirty="0"/>
+              <a:t>Reference Types:</a:t>
+            </a:r>
+            <a:br>
+              <a:rPr lang="en-US" sz="2400" dirty="0"/>
+            </a:br>
+            <a:r>
+              <a:rPr lang="fa-IR" sz="2400" dirty="0"/>
+              <a:t>	</a:t>
+            </a:r>
+            <a:r>
+              <a:rPr lang="en-US" sz="2400" dirty="0"/>
+              <a:t>These types store the address (reference) of an object in memory. Their default value is null.</a:t>
             </a:r>
           </a:p>
           <a:p>
@@ -3985,6 +4010,302 @@
 </file>
 
 <file path=ppt/slides/slide3.xml><?xml version="1.0" encoding="utf-8"?>
+<p:sld xmlns:a="http://schemas.openxmlformats.org/drawingml/2006/main" xmlns:r="http://schemas.openxmlformats.org/officeDocument/2006/relationships" xmlns:p="http://schemas.openxmlformats.org/presentationml/2006/main">
+  <p:cSld>
+    <p:spTree>
+      <p:nvGrpSpPr>
+        <p:cNvPr id="1" name="">
+          <a:extLst>
+            <a:ext uri="{FF2B5EF4-FFF2-40B4-BE49-F238E27FC236}">
+              <a16:creationId xmlns:a16="http://schemas.microsoft.com/office/drawing/2014/main" id="{9115921D-D1AE-618A-5DEA-43E533F07E3F}"/>
+            </a:ext>
+          </a:extLst>
+        </p:cNvPr>
+        <p:cNvGrpSpPr/>
+        <p:nvPr/>
+      </p:nvGrpSpPr>
+      <p:grpSpPr>
+        <a:xfrm>
+          <a:off x="0" y="0"/>
+          <a:ext cx="0" cy="0"/>
+          <a:chOff x="0" y="0"/>
+          <a:chExt cx="0" cy="0"/>
+        </a:xfrm>
+      </p:grpSpPr>
+      <p:sp>
+        <p:nvSpPr>
+          <p:cNvPr id="3" name="TextBox 2">
+            <a:extLst>
+              <a:ext uri="{FF2B5EF4-FFF2-40B4-BE49-F238E27FC236}">
+                <a16:creationId xmlns:a16="http://schemas.microsoft.com/office/drawing/2014/main" id="{D0685ECD-A150-B4C7-D655-9401005F4D98}"/>
+              </a:ext>
+            </a:extLst>
+          </p:cNvPr>
+          <p:cNvSpPr txBox="1"/>
+          <p:nvPr/>
+        </p:nvSpPr>
+        <p:spPr>
+          <a:xfrm>
+            <a:off x="3047246" y="367595"/>
+            <a:ext cx="6097508" cy="646331"/>
+          </a:xfrm>
+          <a:prstGeom prst="rect">
+            <a:avLst/>
+          </a:prstGeom>
+          <a:noFill/>
+        </p:spPr>
+        <p:txBody>
+          <a:bodyPr wrap="square">
+            <a:spAutoFit/>
+          </a:bodyPr>
+          <a:lstStyle/>
+          <a:p>
+            <a:pPr algn="ctr"/>
+            <a:r>
+              <a:rPr lang="en-US" sz="3600" dirty="0"/>
+              <a:t>Primitive Integer Types</a:t>
+            </a:r>
+          </a:p>
+        </p:txBody>
+      </p:sp>
+      <p:sp>
+        <p:nvSpPr>
+          <p:cNvPr id="2" name="TextBox 1">
+            <a:extLst>
+              <a:ext uri="{FF2B5EF4-FFF2-40B4-BE49-F238E27FC236}">
+                <a16:creationId xmlns:a16="http://schemas.microsoft.com/office/drawing/2014/main" id="{71E83919-6995-D35A-3871-EE63D4FFC1C5}"/>
+              </a:ext>
+            </a:extLst>
+          </p:cNvPr>
+          <p:cNvSpPr txBox="1"/>
+          <p:nvPr/>
+        </p:nvSpPr>
+        <p:spPr>
+          <a:xfrm>
+            <a:off x="670140" y="1443395"/>
+            <a:ext cx="5425859" cy="1261884"/>
+          </a:xfrm>
+          <a:prstGeom prst="rect">
+            <a:avLst/>
+          </a:prstGeom>
+          <a:noFill/>
+        </p:spPr>
+        <p:txBody>
+          <a:bodyPr wrap="square" rtlCol="0">
+            <a:spAutoFit/>
+          </a:bodyPr>
+          <a:lstStyle/>
+          <a:p>
+            <a:r>
+              <a:rPr lang="en-US" sz="2800" b="1" dirty="0"/>
+              <a:t>byte</a:t>
+            </a:r>
+          </a:p>
+          <a:p>
+            <a:pPr marL="800100" lvl="1" indent="-342900">
+              <a:buFont typeface="Arial" panose="020B0604020202020204" pitchFamily="34" charset="0"/>
+              <a:buChar char="•"/>
+            </a:pPr>
+            <a:r>
+              <a:rPr lang="en-US" sz="2400" dirty="0"/>
+              <a:t>Size: 8 bits</a:t>
+            </a:r>
+          </a:p>
+          <a:p>
+            <a:pPr marL="800100" lvl="1" indent="-342900">
+              <a:buFont typeface="Arial" panose="020B0604020202020204" pitchFamily="34" charset="0"/>
+              <a:buChar char="•"/>
+            </a:pPr>
+            <a:r>
+              <a:rPr lang="en-US" sz="2400" dirty="0"/>
+              <a:t>Range: -128 to 127</a:t>
+            </a:r>
+          </a:p>
+        </p:txBody>
+      </p:sp>
+      <p:sp>
+        <p:nvSpPr>
+          <p:cNvPr id="5" name="TextBox 4">
+            <a:extLst>
+              <a:ext uri="{FF2B5EF4-FFF2-40B4-BE49-F238E27FC236}">
+                <a16:creationId xmlns:a16="http://schemas.microsoft.com/office/drawing/2014/main" id="{B79C9078-AD7F-EFD3-AFBA-9F83ADC7F786}"/>
+              </a:ext>
+            </a:extLst>
+          </p:cNvPr>
+          <p:cNvSpPr txBox="1"/>
+          <p:nvPr/>
+        </p:nvSpPr>
+        <p:spPr>
+          <a:xfrm>
+            <a:off x="670140" y="3429000"/>
+            <a:ext cx="5425859" cy="1631216"/>
+          </a:xfrm>
+          <a:prstGeom prst="rect">
+            <a:avLst/>
+          </a:prstGeom>
+          <a:noFill/>
+        </p:spPr>
+        <p:txBody>
+          <a:bodyPr wrap="square" rtlCol="0">
+            <a:spAutoFit/>
+          </a:bodyPr>
+          <a:lstStyle/>
+          <a:p>
+            <a:r>
+              <a:rPr lang="en-US" sz="2800" b="1" dirty="0"/>
+              <a:t>int</a:t>
+            </a:r>
+          </a:p>
+          <a:p>
+            <a:pPr marL="800100" lvl="1" indent="-342900">
+              <a:buFont typeface="Arial" panose="020B0604020202020204" pitchFamily="34" charset="0"/>
+              <a:buChar char="•"/>
+            </a:pPr>
+            <a:r>
+              <a:rPr lang="en-US" sz="2400" dirty="0"/>
+              <a:t>Size: 32 bits</a:t>
+            </a:r>
+          </a:p>
+          <a:p>
+            <a:pPr marL="800100" lvl="1" indent="-342900">
+              <a:buFont typeface="Arial" panose="020B0604020202020204" pitchFamily="34" charset="0"/>
+              <a:buChar char="•"/>
+            </a:pPr>
+            <a:r>
+              <a:rPr lang="en-US" sz="2400" dirty="0"/>
+              <a:t>Range: -2,147,483,648 to 2,147,483,647</a:t>
+            </a:r>
+          </a:p>
+        </p:txBody>
+      </p:sp>
+      <p:sp>
+        <p:nvSpPr>
+          <p:cNvPr id="6" name="TextBox 5">
+            <a:extLst>
+              <a:ext uri="{FF2B5EF4-FFF2-40B4-BE49-F238E27FC236}">
+                <a16:creationId xmlns:a16="http://schemas.microsoft.com/office/drawing/2014/main" id="{B2160572-35F6-74BA-7423-B37931C28014}"/>
+              </a:ext>
+            </a:extLst>
+          </p:cNvPr>
+          <p:cNvSpPr txBox="1"/>
+          <p:nvPr/>
+        </p:nvSpPr>
+        <p:spPr>
+          <a:xfrm>
+            <a:off x="6431825" y="3429000"/>
+            <a:ext cx="5425858" cy="1631216"/>
+          </a:xfrm>
+          <a:prstGeom prst="rect">
+            <a:avLst/>
+          </a:prstGeom>
+          <a:noFill/>
+        </p:spPr>
+        <p:txBody>
+          <a:bodyPr wrap="square" rtlCol="0">
+            <a:spAutoFit/>
+          </a:bodyPr>
+          <a:lstStyle/>
+          <a:p>
+            <a:r>
+              <a:rPr lang="en-US" sz="2800" b="1" dirty="0"/>
+              <a:t>long</a:t>
+            </a:r>
+          </a:p>
+          <a:p>
+            <a:pPr marL="800100" lvl="1" indent="-342900">
+              <a:buFont typeface="Arial" panose="020B0604020202020204" pitchFamily="34" charset="0"/>
+              <a:buChar char="•"/>
+            </a:pPr>
+            <a:r>
+              <a:rPr lang="en-US" sz="2400" dirty="0"/>
+              <a:t>Size: 64 bits</a:t>
+            </a:r>
+          </a:p>
+          <a:p>
+            <a:pPr marL="800100" lvl="1" indent="-342900">
+              <a:buFont typeface="Arial" panose="020B0604020202020204" pitchFamily="34" charset="0"/>
+              <a:buChar char="•"/>
+            </a:pPr>
+            <a:r>
+              <a:rPr lang="en-US" sz="2400" dirty="0"/>
+              <a:t>Range: -9,223,372,036,854,775,808 to 9,223,372,036,854,775,807</a:t>
+            </a:r>
+          </a:p>
+        </p:txBody>
+      </p:sp>
+      <p:sp>
+        <p:nvSpPr>
+          <p:cNvPr id="7" name="TextBox 6">
+            <a:extLst>
+              <a:ext uri="{FF2B5EF4-FFF2-40B4-BE49-F238E27FC236}">
+                <a16:creationId xmlns:a16="http://schemas.microsoft.com/office/drawing/2014/main" id="{2765A186-9CE9-3157-07C8-83C6D5B73343}"/>
+              </a:ext>
+            </a:extLst>
+          </p:cNvPr>
+          <p:cNvSpPr txBox="1"/>
+          <p:nvPr/>
+        </p:nvSpPr>
+        <p:spPr>
+          <a:xfrm>
+            <a:off x="6434182" y="1443395"/>
+            <a:ext cx="5425859" cy="1261884"/>
+          </a:xfrm>
+          <a:prstGeom prst="rect">
+            <a:avLst/>
+          </a:prstGeom>
+          <a:noFill/>
+        </p:spPr>
+        <p:txBody>
+          <a:bodyPr wrap="square" rtlCol="0">
+            <a:spAutoFit/>
+          </a:bodyPr>
+          <a:lstStyle/>
+          <a:p>
+            <a:r>
+              <a:rPr lang="en-US" sz="2800" b="1" dirty="0"/>
+              <a:t>short</a:t>
+            </a:r>
+            <a:endParaRPr lang="en-US" sz="2800" dirty="0"/>
+          </a:p>
+          <a:p>
+            <a:pPr marL="800100" lvl="1" indent="-342900">
+              <a:buFont typeface="Arial" panose="020B0604020202020204" pitchFamily="34" charset="0"/>
+              <a:buChar char="•"/>
+            </a:pPr>
+            <a:r>
+              <a:rPr lang="en-US" sz="2400" dirty="0"/>
+              <a:t>Size: 16 bits</a:t>
+            </a:r>
+          </a:p>
+          <a:p>
+            <a:pPr marL="800100" lvl="1" indent="-342900">
+              <a:buFont typeface="Arial" panose="020B0604020202020204" pitchFamily="34" charset="0"/>
+              <a:buChar char="•"/>
+            </a:pPr>
+            <a:r>
+              <a:rPr lang="en-US" sz="2400" dirty="0"/>
+              <a:t>Range: -32,768 to 32,767</a:t>
+            </a:r>
+            <a:endParaRPr lang="en-US" sz="2400" dirty="0">
+              <a:effectLst/>
+            </a:endParaRPr>
+          </a:p>
+        </p:txBody>
+      </p:sp>
+    </p:spTree>
+    <p:extLst>
+      <p:ext uri="{BB962C8B-B14F-4D97-AF65-F5344CB8AC3E}">
+        <p14:creationId xmlns:p14="http://schemas.microsoft.com/office/powerpoint/2010/main" val="766184334"/>
+      </p:ext>
+    </p:extLst>
+  </p:cSld>
+  <p:clrMapOvr>
+    <a:masterClrMapping/>
+  </p:clrMapOvr>
+</p:sld>
+</file>
+
+<file path=ppt/slides/slide4.xml><?xml version="1.0" encoding="utf-8"?>
 <p:sld xmlns:a="http://schemas.openxmlformats.org/drawingml/2006/main" xmlns:r="http://schemas.openxmlformats.org/officeDocument/2006/relationships" xmlns:p="http://schemas.openxmlformats.org/presentationml/2006/main">
   <p:cSld>
     <p:spTree>

--- a/Data Structures/Data Structures.PPTX
+++ b/Data Structures/Data Structures.PPTX
@@ -8,7 +8,10 @@
     <p:sldId id="256" r:id="rId2"/>
     <p:sldId id="258" r:id="rId3"/>
     <p:sldId id="259" r:id="rId4"/>
-    <p:sldId id="257" r:id="rId5"/>
+    <p:sldId id="260" r:id="rId5"/>
+    <p:sldId id="264" r:id="rId6"/>
+    <p:sldId id="265" r:id="rId7"/>
+    <p:sldId id="266" r:id="rId8"/>
   </p:sldIdLst>
   <p:sldSz cx="12192000" cy="6858000"/>
   <p:notesSz cx="6858000" cy="9144000"/>
@@ -341,7 +344,7 @@
           <a:p>
             <a:fld id="{08FC4484-2015-42D6-8B77-7AF40A59800F}" type="datetimeFigureOut">
               <a:rPr lang="en-US" smtClean="0"/>
-              <a:t>5/2/2026</a:t>
+              <a:t>5/3/2026</a:t>
             </a:fld>
             <a:endParaRPr lang="en-US"/>
           </a:p>
@@ -549,7 +552,7 @@
           <a:p>
             <a:fld id="{08FC4484-2015-42D6-8B77-7AF40A59800F}" type="datetimeFigureOut">
               <a:rPr lang="en-US" smtClean="0"/>
-              <a:t>5/2/2026</a:t>
+              <a:t>5/3/2026</a:t>
             </a:fld>
             <a:endParaRPr lang="en-US"/>
           </a:p>
@@ -805,7 +808,7 @@
           <a:p>
             <a:fld id="{08FC4484-2015-42D6-8B77-7AF40A59800F}" type="datetimeFigureOut">
               <a:rPr lang="en-US" smtClean="0"/>
-              <a:t>5/2/2026</a:t>
+              <a:t>5/3/2026</a:t>
             </a:fld>
             <a:endParaRPr lang="en-US"/>
           </a:p>
@@ -975,7 +978,7 @@
           <a:p>
             <a:fld id="{08FC4484-2015-42D6-8B77-7AF40A59800F}" type="datetimeFigureOut">
               <a:rPr lang="en-US" smtClean="0"/>
-              <a:t>5/2/2026</a:t>
+              <a:t>5/3/2026</a:t>
             </a:fld>
             <a:endParaRPr lang="en-US"/>
           </a:p>
@@ -1318,7 +1321,7 @@
           <a:p>
             <a:fld id="{08FC4484-2015-42D6-8B77-7AF40A59800F}" type="datetimeFigureOut">
               <a:rPr lang="en-US" smtClean="0"/>
-              <a:t>5/2/2026</a:t>
+              <a:t>5/3/2026</a:t>
             </a:fld>
             <a:endParaRPr lang="en-US"/>
           </a:p>
@@ -1593,7 +1596,7 @@
           <a:p>
             <a:fld id="{08FC4484-2015-42D6-8B77-7AF40A59800F}" type="datetimeFigureOut">
               <a:rPr lang="en-US" smtClean="0"/>
-              <a:t>5/2/2026</a:t>
+              <a:t>5/3/2026</a:t>
             </a:fld>
             <a:endParaRPr lang="en-US"/>
           </a:p>
@@ -1972,7 +1975,7 @@
           <a:p>
             <a:fld id="{08FC4484-2015-42D6-8B77-7AF40A59800F}" type="datetimeFigureOut">
               <a:rPr lang="en-US" smtClean="0"/>
-              <a:t>5/2/2026</a:t>
+              <a:t>5/3/2026</a:t>
             </a:fld>
             <a:endParaRPr lang="en-US"/>
           </a:p>
@@ -2090,7 +2093,7 @@
           <a:p>
             <a:fld id="{08FC4484-2015-42D6-8B77-7AF40A59800F}" type="datetimeFigureOut">
               <a:rPr lang="en-US" smtClean="0"/>
-              <a:t>5/2/2026</a:t>
+              <a:t>5/3/2026</a:t>
             </a:fld>
             <a:endParaRPr lang="en-US"/>
           </a:p>
@@ -2261,7 +2264,7 @@
           <a:p>
             <a:fld id="{08FC4484-2015-42D6-8B77-7AF40A59800F}" type="datetimeFigureOut">
               <a:rPr lang="en-US" smtClean="0"/>
-              <a:t>5/2/2026</a:t>
+              <a:t>5/3/2026</a:t>
             </a:fld>
             <a:endParaRPr lang="en-US"/>
           </a:p>
@@ -2615,7 +2618,7 @@
           <a:p>
             <a:fld id="{08FC4484-2015-42D6-8B77-7AF40A59800F}" type="datetimeFigureOut">
               <a:rPr lang="en-US" smtClean="0"/>
-              <a:t>5/2/2026</a:t>
+              <a:t>5/3/2026</a:t>
             </a:fld>
             <a:endParaRPr lang="en-US"/>
           </a:p>
@@ -2992,7 +2995,7 @@
           <a:p>
             <a:fld id="{08FC4484-2015-42D6-8B77-7AF40A59800F}" type="datetimeFigureOut">
               <a:rPr lang="en-US" smtClean="0"/>
-              <a:t>5/2/2026</a:t>
+              <a:t>5/3/2026</a:t>
             </a:fld>
             <a:endParaRPr lang="en-US"/>
           </a:p>
@@ -3279,7 +3282,7 @@
           <a:p>
             <a:fld id="{08FC4484-2015-42D6-8B77-7AF40A59800F}" type="datetimeFigureOut">
               <a:rPr lang="en-US" smtClean="0"/>
-              <a:t>5/2/2026</a:t>
+              <a:t>5/3/2026</a:t>
             </a:fld>
             <a:endParaRPr lang="en-US"/>
           </a:p>
@@ -4310,7 +4313,13 @@
   <p:cSld>
     <p:spTree>
       <p:nvGrpSpPr>
-        <p:cNvPr id="1" name=""/>
+        <p:cNvPr id="1" name="">
+          <a:extLst>
+            <a:ext uri="{FF2B5EF4-FFF2-40B4-BE49-F238E27FC236}">
+              <a16:creationId xmlns:a16="http://schemas.microsoft.com/office/drawing/2014/main" id="{0C9501B0-0A03-40DC-5FCB-B4D726704551}"/>
+            </a:ext>
+          </a:extLst>
+        </p:cNvPr>
         <p:cNvGrpSpPr/>
         <p:nvPr/>
       </p:nvGrpSpPr>
@@ -4324,10 +4333,10 @@
       </p:grpSpPr>
       <p:sp>
         <p:nvSpPr>
-          <p:cNvPr id="2" name="TextBox 1">
+          <p:cNvPr id="3" name="TextBox 2">
             <a:extLst>
               <a:ext uri="{FF2B5EF4-FFF2-40B4-BE49-F238E27FC236}">
-                <a16:creationId xmlns:a16="http://schemas.microsoft.com/office/drawing/2014/main" id="{7A6C5E35-F94E-A381-ADD5-E72D42CC277A}"/>
+                <a16:creationId xmlns:a16="http://schemas.microsoft.com/office/drawing/2014/main" id="{B43F80BA-781B-1B41-469A-FB4040A9A594}"/>
               </a:ext>
             </a:extLst>
           </p:cNvPr>
@@ -4336,8 +4345,8 @@
         </p:nvSpPr>
         <p:spPr>
           <a:xfrm>
-            <a:off x="4213412" y="294148"/>
-            <a:ext cx="3765176" cy="584775"/>
+            <a:off x="3047246" y="367595"/>
+            <a:ext cx="6097508" cy="646331"/>
           </a:xfrm>
           <a:prstGeom prst="rect">
             <a:avLst/>
@@ -4345,25 +4354,25 @@
           <a:noFill/>
         </p:spPr>
         <p:txBody>
-          <a:bodyPr wrap="square" rtlCol="0">
+          <a:bodyPr wrap="square">
             <a:spAutoFit/>
           </a:bodyPr>
           <a:lstStyle/>
           <a:p>
             <a:pPr algn="ctr"/>
             <a:r>
-              <a:rPr lang="en-US" sz="3200" dirty="0"/>
-              <a:t>Primitive Data Types</a:t>
-            </a:r>
-          </a:p>
-        </p:txBody>
-      </p:sp>
-      <p:sp>
-        <p:nvSpPr>
-          <p:cNvPr id="3" name="TextBox 2">
+              <a:rPr lang="en-US" sz="3600" dirty="0"/>
+              <a:t>Primitive Floating-Point Types</a:t>
+            </a:r>
+          </a:p>
+        </p:txBody>
+      </p:sp>
+      <p:sp>
+        <p:nvSpPr>
+          <p:cNvPr id="2" name="TextBox 1">
             <a:extLst>
               <a:ext uri="{FF2B5EF4-FFF2-40B4-BE49-F238E27FC236}">
-                <a16:creationId xmlns:a16="http://schemas.microsoft.com/office/drawing/2014/main" id="{EF4E1B50-100F-F067-3DFF-251BB81CD81B}"/>
+                <a16:creationId xmlns:a16="http://schemas.microsoft.com/office/drawing/2014/main" id="{B862CF4D-50AD-A48E-8D74-73719AAFE526}"/>
               </a:ext>
             </a:extLst>
           </p:cNvPr>
@@ -4372,8 +4381,8 @@
         </p:nvSpPr>
         <p:spPr>
           <a:xfrm>
-            <a:off x="0" y="1123367"/>
-            <a:ext cx="6096000" cy="461665"/>
+            <a:off x="2820200" y="1628507"/>
+            <a:ext cx="6551599" cy="3600986"/>
           </a:xfrm>
           <a:prstGeom prst="rect">
             <a:avLst/>
@@ -4386,20 +4395,124 @@
           </a:bodyPr>
           <a:lstStyle/>
           <a:p>
-            <a:pPr algn="ctr"/>
+            <a:r>
+              <a:rPr lang="en-US" sz="2800" b="1" dirty="0"/>
+              <a:t>float</a:t>
+            </a:r>
+          </a:p>
+          <a:p>
+            <a:pPr marL="800100" lvl="1" indent="-342900">
+              <a:buFont typeface="Arial" panose="020B0604020202020204" pitchFamily="34" charset="0"/>
+              <a:buChar char="•"/>
+            </a:pPr>
             <a:r>
               <a:rPr lang="en-US" sz="2400" dirty="0"/>
-              <a:t>Numerical primitive data types </a:t>
-            </a:r>
-          </a:p>
-        </p:txBody>
-      </p:sp>
-      <p:sp>
-        <p:nvSpPr>
-          <p:cNvPr id="4" name="TextBox 3">
+              <a:t>Size: 32 bits</a:t>
+            </a:r>
+          </a:p>
+          <a:p>
+            <a:pPr marL="800100" lvl="1" indent="-342900">
+              <a:buFont typeface="Arial" panose="020B0604020202020204" pitchFamily="34" charset="0"/>
+              <a:buChar char="•"/>
+            </a:pPr>
+            <a:r>
+              <a:rPr lang="en-US" sz="2400" dirty="0"/>
+              <a:t>Range: approx. 1.4e-45 to 3.4e+38</a:t>
+            </a:r>
+          </a:p>
+          <a:p>
+            <a:pPr marL="800100" lvl="1" indent="-342900">
+              <a:buFont typeface="Arial" panose="020B0604020202020204" pitchFamily="34" charset="0"/>
+              <a:buChar char="•"/>
+            </a:pPr>
+            <a:r>
+              <a:rPr lang="en-US" sz="2400" dirty="0"/>
+              <a:t>Description: Single-precision floating-point </a:t>
+            </a:r>
+          </a:p>
+          <a:p>
+            <a:endParaRPr lang="fa-IR" sz="2800" b="1" dirty="0"/>
+          </a:p>
+          <a:p>
+            <a:r>
+              <a:rPr lang="en-US" sz="2800" b="1" dirty="0"/>
+              <a:t>double</a:t>
+            </a:r>
+          </a:p>
+          <a:p>
+            <a:pPr marL="800100" lvl="1" indent="-342900">
+              <a:buFont typeface="Arial" panose="020B0604020202020204" pitchFamily="34" charset="0"/>
+              <a:buChar char="•"/>
+            </a:pPr>
+            <a:r>
+              <a:rPr lang="en-US" sz="2400" dirty="0"/>
+              <a:t>Size: 64 bits</a:t>
+            </a:r>
+          </a:p>
+          <a:p>
+            <a:pPr marL="800100" lvl="1" indent="-342900">
+              <a:buFont typeface="Arial" panose="020B0604020202020204" pitchFamily="34" charset="0"/>
+              <a:buChar char="•"/>
+            </a:pPr>
+            <a:r>
+              <a:rPr lang="en-US" sz="2400" dirty="0"/>
+              <a:t>Range: approx. 4.9e-324 to 1.8e+308</a:t>
+            </a:r>
+          </a:p>
+          <a:p>
+            <a:pPr marL="800100" lvl="1" indent="-342900">
+              <a:buFont typeface="Arial" panose="020B0604020202020204" pitchFamily="34" charset="0"/>
+              <a:buChar char="•"/>
+            </a:pPr>
+            <a:r>
+              <a:rPr lang="en-US" sz="2400" dirty="0"/>
+              <a:t>Description: Double-precision floating-point</a:t>
+            </a:r>
+          </a:p>
+        </p:txBody>
+      </p:sp>
+    </p:spTree>
+    <p:extLst>
+      <p:ext uri="{BB962C8B-B14F-4D97-AF65-F5344CB8AC3E}">
+        <p14:creationId xmlns:p14="http://schemas.microsoft.com/office/powerpoint/2010/main" val="1159323460"/>
+      </p:ext>
+    </p:extLst>
+  </p:cSld>
+  <p:clrMapOvr>
+    <a:masterClrMapping/>
+  </p:clrMapOvr>
+</p:sld>
+</file>
+
+<file path=ppt/slides/slide5.xml><?xml version="1.0" encoding="utf-8"?>
+<p:sld xmlns:a="http://schemas.openxmlformats.org/drawingml/2006/main" xmlns:r="http://schemas.openxmlformats.org/officeDocument/2006/relationships" xmlns:p="http://schemas.openxmlformats.org/presentationml/2006/main">
+  <p:cSld>
+    <p:spTree>
+      <p:nvGrpSpPr>
+        <p:cNvPr id="1" name="">
+          <a:extLst>
+            <a:ext uri="{FF2B5EF4-FFF2-40B4-BE49-F238E27FC236}">
+              <a16:creationId xmlns:a16="http://schemas.microsoft.com/office/drawing/2014/main" id="{D62B797F-A7CE-4DBC-9928-BAB592EF0C0C}"/>
+            </a:ext>
+          </a:extLst>
+        </p:cNvPr>
+        <p:cNvGrpSpPr/>
+        <p:nvPr/>
+      </p:nvGrpSpPr>
+      <p:grpSpPr>
+        <a:xfrm>
+          <a:off x="0" y="0"/>
+          <a:ext cx="0" cy="0"/>
+          <a:chOff x="0" y="0"/>
+          <a:chExt cx="0" cy="0"/>
+        </a:xfrm>
+      </p:grpSpPr>
+      <p:sp>
+        <p:nvSpPr>
+          <p:cNvPr id="3" name="TextBox 2">
             <a:extLst>
               <a:ext uri="{FF2B5EF4-FFF2-40B4-BE49-F238E27FC236}">
-                <a16:creationId xmlns:a16="http://schemas.microsoft.com/office/drawing/2014/main" id="{8D43265B-2D04-BE64-39EE-F9412CA43C6A}"/>
+                <a16:creationId xmlns:a16="http://schemas.microsoft.com/office/drawing/2014/main" id="{79934781-EAE2-0FAE-3D39-963653996791}"/>
               </a:ext>
             </a:extLst>
           </p:cNvPr>
@@ -4408,8 +4521,8 @@
         </p:nvSpPr>
         <p:spPr>
           <a:xfrm>
-            <a:off x="6096000" y="1123367"/>
-            <a:ext cx="6096000" cy="461665"/>
+            <a:off x="2617582" y="367595"/>
+            <a:ext cx="6956833" cy="646331"/>
           </a:xfrm>
           <a:prstGeom prst="rect">
             <a:avLst/>
@@ -4417,15 +4530,129 @@
           <a:noFill/>
         </p:spPr>
         <p:txBody>
+          <a:bodyPr wrap="square">
+            <a:spAutoFit/>
+          </a:bodyPr>
+          <a:lstStyle/>
+          <a:p>
+            <a:pPr algn="ctr"/>
+            <a:r>
+              <a:rPr lang="en-US" sz="3600" dirty="0"/>
+              <a:t>Primitive Non-Numerical Types</a:t>
+            </a:r>
+          </a:p>
+        </p:txBody>
+      </p:sp>
+      <p:sp>
+        <p:nvSpPr>
+          <p:cNvPr id="2" name="TextBox 1">
+            <a:extLst>
+              <a:ext uri="{FF2B5EF4-FFF2-40B4-BE49-F238E27FC236}">
+                <a16:creationId xmlns:a16="http://schemas.microsoft.com/office/drawing/2014/main" id="{618CF60E-6E1F-34CA-BF6B-DAA1CEFBDAED}"/>
+              </a:ext>
+            </a:extLst>
+          </p:cNvPr>
+          <p:cNvSpPr txBox="1"/>
+          <p:nvPr/>
+        </p:nvSpPr>
+        <p:spPr>
+          <a:xfrm>
+            <a:off x="2757554" y="1628507"/>
+            <a:ext cx="6676887" cy="3600986"/>
+          </a:xfrm>
+          <a:prstGeom prst="rect">
+            <a:avLst/>
+          </a:prstGeom>
+          <a:noFill/>
+        </p:spPr>
+        <p:txBody>
           <a:bodyPr wrap="square" rtlCol="0">
             <a:spAutoFit/>
           </a:bodyPr>
           <a:lstStyle/>
           <a:p>
-            <a:pPr algn="ctr"/>
+            <a:r>
+              <a:rPr lang="en-US" sz="2800" b="1" dirty="0"/>
+              <a:t>char</a:t>
+            </a:r>
+            <a:endParaRPr lang="en-US" sz="2800" dirty="0"/>
+          </a:p>
+          <a:p>
+            <a:pPr marL="800100" lvl="1" indent="-342900">
+              <a:buFont typeface="Arial" panose="020B0604020202020204" pitchFamily="34" charset="0"/>
+              <a:buChar char="•"/>
+            </a:pPr>
             <a:r>
               <a:rPr lang="en-US" sz="2400" dirty="0"/>
-              <a:t>Non-numerical primitive data types </a:t>
+              <a:t>Size: 16 bits</a:t>
+            </a:r>
+          </a:p>
+          <a:p>
+            <a:pPr marL="800100" lvl="1" indent="-342900">
+              <a:buFont typeface="Arial" panose="020B0604020202020204" pitchFamily="34" charset="0"/>
+              <a:buChar char="•"/>
+            </a:pPr>
+            <a:r>
+              <a:rPr lang="en-US" sz="2400" dirty="0"/>
+              <a:t>Range: '\u0000' to '\</a:t>
+            </a:r>
+            <a:r>
+              <a:rPr lang="en-US" sz="2400" dirty="0" err="1"/>
+              <a:t>uffff</a:t>
+            </a:r>
+            <a:r>
+              <a:rPr lang="en-US" sz="2400" dirty="0"/>
+              <a:t>' (0 to 65,535)</a:t>
+            </a:r>
+          </a:p>
+          <a:p>
+            <a:pPr marL="800100" lvl="1" indent="-342900">
+              <a:buFont typeface="Arial" panose="020B0604020202020204" pitchFamily="34" charset="0"/>
+              <a:buChar char="•"/>
+            </a:pPr>
+            <a:r>
+              <a:rPr lang="en-US" sz="2400" dirty="0"/>
+              <a:t>Description: A single Unicode character</a:t>
+            </a:r>
+          </a:p>
+          <a:p>
+            <a:endParaRPr lang="fa-IR" sz="2800" b="1" dirty="0"/>
+          </a:p>
+          <a:p>
+            <a:r>
+              <a:rPr lang="en-US" sz="2800" b="1" dirty="0" err="1"/>
+              <a:t>boolean</a:t>
+            </a:r>
+            <a:endParaRPr lang="en-US" sz="2800" dirty="0"/>
+          </a:p>
+          <a:p>
+            <a:pPr marL="800100" lvl="1" indent="-342900">
+              <a:buFont typeface="Arial" panose="020B0604020202020204" pitchFamily="34" charset="0"/>
+              <a:buChar char="•"/>
+            </a:pPr>
+            <a:r>
+              <a:rPr lang="en-US" sz="2400" dirty="0"/>
+              <a:t>Size: JVM‑dependent (typically 1 byte or 1 bit)</a:t>
+            </a:r>
+          </a:p>
+          <a:p>
+            <a:pPr marL="800100" lvl="1" indent="-342900">
+              <a:buFont typeface="Arial" panose="020B0604020202020204" pitchFamily="34" charset="0"/>
+              <a:buChar char="•"/>
+            </a:pPr>
+            <a:r>
+              <a:rPr lang="en-US" sz="2400" dirty="0"/>
+              <a:t>Values: true or false</a:t>
+            </a:r>
+          </a:p>
+          <a:p>
+            <a:pPr marL="800100" lvl="1" indent="-342900">
+              <a:buFont typeface="Arial" panose="020B0604020202020204" pitchFamily="34" charset="0"/>
+              <a:buChar char="•"/>
+            </a:pPr>
+            <a:r>
+              <a:rPr lang="en-US" sz="2400" dirty="0"/>
+              <a:t>Description: Logical value (truth value)</a:t>
             </a:r>
           </a:p>
         </p:txBody>
@@ -4433,7 +4660,379 @@
     </p:spTree>
     <p:extLst>
       <p:ext uri="{BB962C8B-B14F-4D97-AF65-F5344CB8AC3E}">
-        <p14:creationId xmlns:p14="http://schemas.microsoft.com/office/powerpoint/2010/main" val="1277552612"/>
+        <p14:creationId xmlns:p14="http://schemas.microsoft.com/office/powerpoint/2010/main" val="611590075"/>
+      </p:ext>
+    </p:extLst>
+  </p:cSld>
+  <p:clrMapOvr>
+    <a:masterClrMapping/>
+  </p:clrMapOvr>
+</p:sld>
+</file>
+
+<file path=ppt/slides/slide6.xml><?xml version="1.0" encoding="utf-8"?>
+<p:sld xmlns:a="http://schemas.openxmlformats.org/drawingml/2006/main" xmlns:r="http://schemas.openxmlformats.org/officeDocument/2006/relationships" xmlns:p="http://schemas.openxmlformats.org/presentationml/2006/main">
+  <p:cSld>
+    <p:spTree>
+      <p:nvGrpSpPr>
+        <p:cNvPr id="1" name="">
+          <a:extLst>
+            <a:ext uri="{FF2B5EF4-FFF2-40B4-BE49-F238E27FC236}">
+              <a16:creationId xmlns:a16="http://schemas.microsoft.com/office/drawing/2014/main" id="{9D6BC5A6-8257-A253-F70D-B4A3BEFA0CF7}"/>
+            </a:ext>
+          </a:extLst>
+        </p:cNvPr>
+        <p:cNvGrpSpPr/>
+        <p:nvPr/>
+      </p:nvGrpSpPr>
+      <p:grpSpPr>
+        <a:xfrm>
+          <a:off x="0" y="0"/>
+          <a:ext cx="0" cy="0"/>
+          <a:chOff x="0" y="0"/>
+          <a:chExt cx="0" cy="0"/>
+        </a:xfrm>
+      </p:grpSpPr>
+      <p:sp>
+        <p:nvSpPr>
+          <p:cNvPr id="3" name="TextBox 2">
+            <a:extLst>
+              <a:ext uri="{FF2B5EF4-FFF2-40B4-BE49-F238E27FC236}">
+                <a16:creationId xmlns:a16="http://schemas.microsoft.com/office/drawing/2014/main" id="{536E2577-4C8D-880F-5024-882972E0DA41}"/>
+              </a:ext>
+            </a:extLst>
+          </p:cNvPr>
+          <p:cNvSpPr txBox="1"/>
+          <p:nvPr/>
+        </p:nvSpPr>
+        <p:spPr>
+          <a:xfrm>
+            <a:off x="2617582" y="367595"/>
+            <a:ext cx="6956833" cy="646331"/>
+          </a:xfrm>
+          <a:prstGeom prst="rect">
+            <a:avLst/>
+          </a:prstGeom>
+          <a:noFill/>
+        </p:spPr>
+        <p:txBody>
+          <a:bodyPr wrap="square">
+            <a:spAutoFit/>
+          </a:bodyPr>
+          <a:lstStyle/>
+          <a:p>
+            <a:pPr algn="ctr"/>
+            <a:r>
+              <a:rPr lang="en-US" sz="3600" dirty="0"/>
+              <a:t>Primitive Non-Numerical Types</a:t>
+            </a:r>
+          </a:p>
+        </p:txBody>
+      </p:sp>
+      <p:sp>
+        <p:nvSpPr>
+          <p:cNvPr id="2" name="TextBox 1">
+            <a:extLst>
+              <a:ext uri="{FF2B5EF4-FFF2-40B4-BE49-F238E27FC236}">
+                <a16:creationId xmlns:a16="http://schemas.microsoft.com/office/drawing/2014/main" id="{EF4D5FC0-8A74-5E63-9594-FFA125344E0A}"/>
+              </a:ext>
+            </a:extLst>
+          </p:cNvPr>
+          <p:cNvSpPr txBox="1"/>
+          <p:nvPr/>
+        </p:nvSpPr>
+        <p:spPr>
+          <a:xfrm>
+            <a:off x="2757554" y="1628507"/>
+            <a:ext cx="6676887" cy="3600986"/>
+          </a:xfrm>
+          <a:prstGeom prst="rect">
+            <a:avLst/>
+          </a:prstGeom>
+          <a:noFill/>
+        </p:spPr>
+        <p:txBody>
+          <a:bodyPr wrap="square" rtlCol="0">
+            <a:spAutoFit/>
+          </a:bodyPr>
+          <a:lstStyle/>
+          <a:p>
+            <a:r>
+              <a:rPr lang="en-US" sz="2800" b="1" dirty="0"/>
+              <a:t>char</a:t>
+            </a:r>
+            <a:endParaRPr lang="en-US" sz="2800" dirty="0"/>
+          </a:p>
+          <a:p>
+            <a:pPr marL="800100" lvl="1" indent="-342900">
+              <a:buFont typeface="Arial" panose="020B0604020202020204" pitchFamily="34" charset="0"/>
+              <a:buChar char="•"/>
+            </a:pPr>
+            <a:r>
+              <a:rPr lang="en-US" sz="2400" dirty="0"/>
+              <a:t>Size: 16 bits</a:t>
+            </a:r>
+          </a:p>
+          <a:p>
+            <a:pPr marL="800100" lvl="1" indent="-342900">
+              <a:buFont typeface="Arial" panose="020B0604020202020204" pitchFamily="34" charset="0"/>
+              <a:buChar char="•"/>
+            </a:pPr>
+            <a:r>
+              <a:rPr lang="en-US" sz="2400" dirty="0"/>
+              <a:t>Range: '\u0000' to '\</a:t>
+            </a:r>
+            <a:r>
+              <a:rPr lang="en-US" sz="2400" dirty="0" err="1"/>
+              <a:t>uffff</a:t>
+            </a:r>
+            <a:r>
+              <a:rPr lang="en-US" sz="2400" dirty="0"/>
+              <a:t>' (0 to 65,535)</a:t>
+            </a:r>
+          </a:p>
+          <a:p>
+            <a:pPr marL="800100" lvl="1" indent="-342900">
+              <a:buFont typeface="Arial" panose="020B0604020202020204" pitchFamily="34" charset="0"/>
+              <a:buChar char="•"/>
+            </a:pPr>
+            <a:r>
+              <a:rPr lang="en-US" sz="2400" dirty="0"/>
+              <a:t>Description: A single Unicode character</a:t>
+            </a:r>
+          </a:p>
+          <a:p>
+            <a:endParaRPr lang="fa-IR" sz="2800" b="1" dirty="0"/>
+          </a:p>
+          <a:p>
+            <a:r>
+              <a:rPr lang="en-US" sz="2800" b="1" dirty="0" err="1"/>
+              <a:t>boolean</a:t>
+            </a:r>
+            <a:endParaRPr lang="en-US" sz="2800" dirty="0"/>
+          </a:p>
+          <a:p>
+            <a:pPr marL="800100" lvl="1" indent="-342900">
+              <a:buFont typeface="Arial" panose="020B0604020202020204" pitchFamily="34" charset="0"/>
+              <a:buChar char="•"/>
+            </a:pPr>
+            <a:r>
+              <a:rPr lang="en-US" sz="2400" dirty="0"/>
+              <a:t>Size: JVM‑dependent (typically 1 byte or 1 bit)</a:t>
+            </a:r>
+          </a:p>
+          <a:p>
+            <a:pPr marL="800100" lvl="1" indent="-342900">
+              <a:buFont typeface="Arial" panose="020B0604020202020204" pitchFamily="34" charset="0"/>
+              <a:buChar char="•"/>
+            </a:pPr>
+            <a:r>
+              <a:rPr lang="en-US" sz="2400" dirty="0"/>
+              <a:t>Values: true or false</a:t>
+            </a:r>
+          </a:p>
+          <a:p>
+            <a:pPr marL="800100" lvl="1" indent="-342900">
+              <a:buFont typeface="Arial" panose="020B0604020202020204" pitchFamily="34" charset="0"/>
+              <a:buChar char="•"/>
+            </a:pPr>
+            <a:r>
+              <a:rPr lang="en-US" sz="2400" dirty="0"/>
+              <a:t>Description: Logical value (truth value)</a:t>
+            </a:r>
+          </a:p>
+        </p:txBody>
+      </p:sp>
+    </p:spTree>
+    <p:extLst>
+      <p:ext uri="{BB962C8B-B14F-4D97-AF65-F5344CB8AC3E}">
+        <p14:creationId xmlns:p14="http://schemas.microsoft.com/office/powerpoint/2010/main" val="300660763"/>
+      </p:ext>
+    </p:extLst>
+  </p:cSld>
+  <p:clrMapOvr>
+    <a:masterClrMapping/>
+  </p:clrMapOvr>
+</p:sld>
+</file>
+
+<file path=ppt/slides/slide7.xml><?xml version="1.0" encoding="utf-8"?>
+<p:sld xmlns:a="http://schemas.openxmlformats.org/drawingml/2006/main" xmlns:r="http://schemas.openxmlformats.org/officeDocument/2006/relationships" xmlns:p="http://schemas.openxmlformats.org/presentationml/2006/main">
+  <p:cSld>
+    <p:spTree>
+      <p:nvGrpSpPr>
+        <p:cNvPr id="1" name="">
+          <a:extLst>
+            <a:ext uri="{FF2B5EF4-FFF2-40B4-BE49-F238E27FC236}">
+              <a16:creationId xmlns:a16="http://schemas.microsoft.com/office/drawing/2014/main" id="{124D20B0-9682-8E94-F2F0-A78969595B90}"/>
+            </a:ext>
+          </a:extLst>
+        </p:cNvPr>
+        <p:cNvGrpSpPr/>
+        <p:nvPr/>
+      </p:nvGrpSpPr>
+      <p:grpSpPr>
+        <a:xfrm>
+          <a:off x="0" y="0"/>
+          <a:ext cx="0" cy="0"/>
+          <a:chOff x="0" y="0"/>
+          <a:chExt cx="0" cy="0"/>
+        </a:xfrm>
+      </p:grpSpPr>
+      <p:sp>
+        <p:nvSpPr>
+          <p:cNvPr id="3" name="TextBox 2">
+            <a:extLst>
+              <a:ext uri="{FF2B5EF4-FFF2-40B4-BE49-F238E27FC236}">
+                <a16:creationId xmlns:a16="http://schemas.microsoft.com/office/drawing/2014/main" id="{5526E065-92E8-3EAF-7946-8DA1D642854B}"/>
+              </a:ext>
+            </a:extLst>
+          </p:cNvPr>
+          <p:cNvSpPr txBox="1"/>
+          <p:nvPr/>
+        </p:nvSpPr>
+        <p:spPr>
+          <a:xfrm>
+            <a:off x="2617582" y="367595"/>
+            <a:ext cx="6956833" cy="646331"/>
+          </a:xfrm>
+          <a:prstGeom prst="rect">
+            <a:avLst/>
+          </a:prstGeom>
+          <a:noFill/>
+        </p:spPr>
+        <p:txBody>
+          <a:bodyPr wrap="square">
+            <a:spAutoFit/>
+          </a:bodyPr>
+          <a:lstStyle/>
+          <a:p>
+            <a:pPr algn="ctr"/>
+            <a:r>
+              <a:rPr lang="en-US" sz="3600" dirty="0"/>
+              <a:t>Primitive Non-Numerical Types</a:t>
+            </a:r>
+          </a:p>
+        </p:txBody>
+      </p:sp>
+      <p:sp>
+        <p:nvSpPr>
+          <p:cNvPr id="2" name="TextBox 1">
+            <a:extLst>
+              <a:ext uri="{FF2B5EF4-FFF2-40B4-BE49-F238E27FC236}">
+                <a16:creationId xmlns:a16="http://schemas.microsoft.com/office/drawing/2014/main" id="{DD4C86AE-36D1-9344-84E7-EBA86F8123DF}"/>
+              </a:ext>
+            </a:extLst>
+          </p:cNvPr>
+          <p:cNvSpPr txBox="1"/>
+          <p:nvPr/>
+        </p:nvSpPr>
+        <p:spPr>
+          <a:xfrm>
+            <a:off x="2757554" y="1628507"/>
+            <a:ext cx="6676887" cy="3600986"/>
+          </a:xfrm>
+          <a:prstGeom prst="rect">
+            <a:avLst/>
+          </a:prstGeom>
+          <a:noFill/>
+        </p:spPr>
+        <p:txBody>
+          <a:bodyPr wrap="square" rtlCol="0">
+            <a:spAutoFit/>
+          </a:bodyPr>
+          <a:lstStyle/>
+          <a:p>
+            <a:r>
+              <a:rPr lang="en-US" sz="2800" b="1" dirty="0"/>
+              <a:t>char</a:t>
+            </a:r>
+            <a:endParaRPr lang="en-US" sz="2800" dirty="0"/>
+          </a:p>
+          <a:p>
+            <a:pPr marL="800100" lvl="1" indent="-342900">
+              <a:buFont typeface="Arial" panose="020B0604020202020204" pitchFamily="34" charset="0"/>
+              <a:buChar char="•"/>
+            </a:pPr>
+            <a:r>
+              <a:rPr lang="en-US" sz="2400" dirty="0"/>
+              <a:t>Size: 16 bits</a:t>
+            </a:r>
+          </a:p>
+          <a:p>
+            <a:pPr marL="800100" lvl="1" indent="-342900">
+              <a:buFont typeface="Arial" panose="020B0604020202020204" pitchFamily="34" charset="0"/>
+              <a:buChar char="•"/>
+            </a:pPr>
+            <a:r>
+              <a:rPr lang="en-US" sz="2400" dirty="0"/>
+              <a:t>Range: '\u0000' to '\</a:t>
+            </a:r>
+            <a:r>
+              <a:rPr lang="en-US" sz="2400" dirty="0" err="1"/>
+              <a:t>uffff</a:t>
+            </a:r>
+            <a:r>
+              <a:rPr lang="en-US" sz="2400" dirty="0"/>
+              <a:t>' (0 to 65,535)</a:t>
+            </a:r>
+          </a:p>
+          <a:p>
+            <a:pPr marL="800100" lvl="1" indent="-342900">
+              <a:buFont typeface="Arial" panose="020B0604020202020204" pitchFamily="34" charset="0"/>
+              <a:buChar char="•"/>
+            </a:pPr>
+            <a:r>
+              <a:rPr lang="en-US" sz="2400" dirty="0"/>
+              <a:t>Description: A single Unicode character</a:t>
+            </a:r>
+          </a:p>
+          <a:p>
+            <a:endParaRPr lang="fa-IR" sz="2800" b="1" dirty="0"/>
+          </a:p>
+          <a:p>
+            <a:r>
+              <a:rPr lang="en-US" sz="2800" b="1" dirty="0" err="1"/>
+              <a:t>boolean</a:t>
+            </a:r>
+            <a:endParaRPr lang="en-US" sz="2800" dirty="0"/>
+          </a:p>
+          <a:p>
+            <a:pPr marL="800100" lvl="1" indent="-342900">
+              <a:buFont typeface="Arial" panose="020B0604020202020204" pitchFamily="34" charset="0"/>
+              <a:buChar char="•"/>
+            </a:pPr>
+            <a:r>
+              <a:rPr lang="en-US" sz="2400" dirty="0"/>
+              <a:t>Size: JVM‑dependent (typically 1 byte or 1 bit)</a:t>
+            </a:r>
+          </a:p>
+          <a:p>
+            <a:pPr marL="800100" lvl="1" indent="-342900">
+              <a:buFont typeface="Arial" panose="020B0604020202020204" pitchFamily="34" charset="0"/>
+              <a:buChar char="•"/>
+            </a:pPr>
+            <a:r>
+              <a:rPr lang="en-US" sz="2400" dirty="0"/>
+              <a:t>Values: true or false</a:t>
+            </a:r>
+          </a:p>
+          <a:p>
+            <a:pPr marL="800100" lvl="1" indent="-342900">
+              <a:buFont typeface="Arial" panose="020B0604020202020204" pitchFamily="34" charset="0"/>
+              <a:buChar char="•"/>
+            </a:pPr>
+            <a:r>
+              <a:rPr lang="en-US" sz="2400" dirty="0"/>
+              <a:t>Description: Logical value (truth value)</a:t>
+            </a:r>
+          </a:p>
+        </p:txBody>
+      </p:sp>
+    </p:spTree>
+    <p:extLst>
+      <p:ext uri="{BB962C8B-B14F-4D97-AF65-F5344CB8AC3E}">
+        <p14:creationId xmlns:p14="http://schemas.microsoft.com/office/powerpoint/2010/main" val="3827615744"/>
       </p:ext>
     </p:extLst>
   </p:cSld>

--- a/Data Structures/Data Structures.PPTX
+++ b/Data Structures/Data Structures.PPTX
@@ -4707,8 +4707,8 @@
         </p:nvSpPr>
         <p:spPr>
           <a:xfrm>
-            <a:off x="2617582" y="367595"/>
-            <a:ext cx="6956833" cy="646331"/>
+            <a:off x="858570" y="358542"/>
+            <a:ext cx="10474859" cy="646331"/>
           </a:xfrm>
           <a:prstGeom prst="rect">
             <a:avLst/>
@@ -4724,125 +4724,814 @@
             <a:pPr algn="ctr"/>
             <a:r>
               <a:rPr lang="en-US" sz="3600" dirty="0"/>
-              <a:t>Primitive Non-Numerical Types</a:t>
-            </a:r>
-          </a:p>
-        </p:txBody>
-      </p:sp>
-      <p:sp>
-        <p:nvSpPr>
-          <p:cNvPr id="2" name="TextBox 1">
+              <a:t>Primitive Types Summary Table</a:t>
+            </a:r>
+          </a:p>
+        </p:txBody>
+      </p:sp>
+      <p:graphicFrame>
+        <p:nvGraphicFramePr>
+          <p:cNvPr id="4" name="Table 3">
             <a:extLst>
               <a:ext uri="{FF2B5EF4-FFF2-40B4-BE49-F238E27FC236}">
-                <a16:creationId xmlns:a16="http://schemas.microsoft.com/office/drawing/2014/main" id="{EF4D5FC0-8A74-5E63-9594-FFA125344E0A}"/>
+                <a16:creationId xmlns:a16="http://schemas.microsoft.com/office/drawing/2014/main" id="{2716A8B5-AB9B-F9DA-164D-737FB5EB4D6C}"/>
               </a:ext>
             </a:extLst>
           </p:cNvPr>
-          <p:cNvSpPr txBox="1"/>
-          <p:nvPr/>
-        </p:nvSpPr>
-        <p:spPr>
-          <a:xfrm>
-            <a:off x="2757554" y="1628507"/>
-            <a:ext cx="6676887" cy="3600986"/>
-          </a:xfrm>
-          <a:prstGeom prst="rect">
-            <a:avLst/>
-          </a:prstGeom>
-          <a:noFill/>
-        </p:spPr>
-        <p:txBody>
-          <a:bodyPr wrap="square" rtlCol="0">
-            <a:spAutoFit/>
-          </a:bodyPr>
-          <a:lstStyle/>
-          <a:p>
-            <a:r>
-              <a:rPr lang="en-US" sz="2800" b="1" dirty="0"/>
-              <a:t>char</a:t>
-            </a:r>
-            <a:endParaRPr lang="en-US" sz="2800" dirty="0"/>
-          </a:p>
-          <a:p>
-            <a:pPr marL="800100" lvl="1" indent="-342900">
-              <a:buFont typeface="Arial" panose="020B0604020202020204" pitchFamily="34" charset="0"/>
-              <a:buChar char="•"/>
-            </a:pPr>
-            <a:r>
-              <a:rPr lang="en-US" sz="2400" dirty="0"/>
-              <a:t>Size: 16 bits</a:t>
-            </a:r>
-          </a:p>
-          <a:p>
-            <a:pPr marL="800100" lvl="1" indent="-342900">
-              <a:buFont typeface="Arial" panose="020B0604020202020204" pitchFamily="34" charset="0"/>
-              <a:buChar char="•"/>
-            </a:pPr>
-            <a:r>
-              <a:rPr lang="en-US" sz="2400" dirty="0"/>
-              <a:t>Range: '\u0000' to '\</a:t>
-            </a:r>
-            <a:r>
-              <a:rPr lang="en-US" sz="2400" dirty="0" err="1"/>
-              <a:t>uffff</a:t>
-            </a:r>
-            <a:r>
-              <a:rPr lang="en-US" sz="2400" dirty="0"/>
-              <a:t>' (0 to 65,535)</a:t>
-            </a:r>
-          </a:p>
-          <a:p>
-            <a:pPr marL="800100" lvl="1" indent="-342900">
-              <a:buFont typeface="Arial" panose="020B0604020202020204" pitchFamily="34" charset="0"/>
-              <a:buChar char="•"/>
-            </a:pPr>
-            <a:r>
-              <a:rPr lang="en-US" sz="2400" dirty="0"/>
-              <a:t>Description: A single Unicode character</a:t>
-            </a:r>
-          </a:p>
-          <a:p>
-            <a:endParaRPr lang="fa-IR" sz="2800" b="1" dirty="0"/>
-          </a:p>
-          <a:p>
-            <a:r>
-              <a:rPr lang="en-US" sz="2800" b="1" dirty="0" err="1"/>
-              <a:t>boolean</a:t>
-            </a:r>
-            <a:endParaRPr lang="en-US" sz="2800" dirty="0"/>
-          </a:p>
-          <a:p>
-            <a:pPr marL="800100" lvl="1" indent="-342900">
-              <a:buFont typeface="Arial" panose="020B0604020202020204" pitchFamily="34" charset="0"/>
-              <a:buChar char="•"/>
-            </a:pPr>
-            <a:r>
-              <a:rPr lang="en-US" sz="2400" dirty="0"/>
-              <a:t>Size: JVM‑dependent (typically 1 byte or 1 bit)</a:t>
-            </a:r>
-          </a:p>
-          <a:p>
-            <a:pPr marL="800100" lvl="1" indent="-342900">
-              <a:buFont typeface="Arial" panose="020B0604020202020204" pitchFamily="34" charset="0"/>
-              <a:buChar char="•"/>
-            </a:pPr>
-            <a:r>
-              <a:rPr lang="en-US" sz="2400" dirty="0"/>
-              <a:t>Values: true or false</a:t>
-            </a:r>
-          </a:p>
-          <a:p>
-            <a:pPr marL="800100" lvl="1" indent="-342900">
-              <a:buFont typeface="Arial" panose="020B0604020202020204" pitchFamily="34" charset="0"/>
-              <a:buChar char="•"/>
-            </a:pPr>
-            <a:r>
-              <a:rPr lang="en-US" sz="2400" dirty="0"/>
-              <a:t>Description: Logical value (truth value)</a:t>
-            </a:r>
-          </a:p>
-        </p:txBody>
-      </p:sp>
+          <p:cNvGraphicFramePr>
+            <a:graphicFrameLocks noGrp="1"/>
+          </p:cNvGraphicFramePr>
+          <p:nvPr>
+            <p:extLst>
+              <p:ext uri="{D42A27DB-BD31-4B8C-83A1-F6EECF244321}">
+                <p14:modId xmlns:p14="http://schemas.microsoft.com/office/powerpoint/2010/main" val="1769839468"/>
+              </p:ext>
+            </p:extLst>
+          </p:nvPr>
+        </p:nvGraphicFramePr>
+        <p:xfrm>
+          <a:off x="1043097" y="1104399"/>
+          <a:ext cx="10105806" cy="4962924"/>
+        </p:xfrm>
+        <a:graphic>
+          <a:graphicData uri="http://schemas.openxmlformats.org/drawingml/2006/table">
+            <a:tbl>
+              <a:tblPr firstRow="1" bandRow="1">
+                <a:tableStyleId>{9D7B26C5-4107-4FEC-AEDC-1716B250A1EF}</a:tableStyleId>
+              </a:tblPr>
+              <a:tblGrid>
+                <a:gridCol w="1535632">
+                  <a:extLst>
+                    <a:ext uri="{9D8B030D-6E8A-4147-A177-3AD203B41FA5}">
+                      <a16:colId xmlns:a16="http://schemas.microsoft.com/office/drawing/2014/main" val="2244440888"/>
+                    </a:ext>
+                  </a:extLst>
+                </a:gridCol>
+                <a:gridCol w="2245260">
+                  <a:extLst>
+                    <a:ext uri="{9D8B030D-6E8A-4147-A177-3AD203B41FA5}">
+                      <a16:colId xmlns:a16="http://schemas.microsoft.com/office/drawing/2014/main" val="549673154"/>
+                    </a:ext>
+                  </a:extLst>
+                </a:gridCol>
+                <a:gridCol w="3832132">
+                  <a:extLst>
+                    <a:ext uri="{9D8B030D-6E8A-4147-A177-3AD203B41FA5}">
+                      <a16:colId xmlns:a16="http://schemas.microsoft.com/office/drawing/2014/main" val="2648905586"/>
+                    </a:ext>
+                  </a:extLst>
+                </a:gridCol>
+                <a:gridCol w="2492782">
+                  <a:extLst>
+                    <a:ext uri="{9D8B030D-6E8A-4147-A177-3AD203B41FA5}">
+                      <a16:colId xmlns:a16="http://schemas.microsoft.com/office/drawing/2014/main" val="1975884164"/>
+                    </a:ext>
+                  </a:extLst>
+                </a:gridCol>
+              </a:tblGrid>
+              <a:tr h="496954">
+                <a:tc>
+                  <a:txBody>
+                    <a:bodyPr/>
+                    <a:lstStyle/>
+                    <a:p>
+                      <a:pPr algn="ctr"/>
+                      <a:r>
+                        <a:rPr lang="en-US" sz="2200" dirty="0"/>
+                        <a:t>Type</a:t>
+                      </a:r>
+                    </a:p>
+                  </a:txBody>
+                  <a:tcPr/>
+                </a:tc>
+                <a:tc>
+                  <a:txBody>
+                    <a:bodyPr/>
+                    <a:lstStyle/>
+                    <a:p>
+                      <a:pPr algn="ctr"/>
+                      <a:r>
+                        <a:rPr lang="en-US" sz="2200" dirty="0"/>
+                        <a:t>Size (bits)</a:t>
+                      </a:r>
+                    </a:p>
+                  </a:txBody>
+                  <a:tcPr/>
+                </a:tc>
+                <a:tc>
+                  <a:txBody>
+                    <a:bodyPr/>
+                    <a:lstStyle/>
+                    <a:p>
+                      <a:pPr algn="ctr"/>
+                      <a:r>
+                        <a:rPr lang="en-US" sz="2200" dirty="0"/>
+                        <a:t>Range / Values</a:t>
+                      </a:r>
+                    </a:p>
+                  </a:txBody>
+                  <a:tcPr/>
+                </a:tc>
+                <a:tc>
+                  <a:txBody>
+                    <a:bodyPr/>
+                    <a:lstStyle/>
+                    <a:p>
+                      <a:pPr algn="ctr"/>
+                      <a:r>
+                        <a:rPr lang="en-US" sz="2400" b="1" i="0" kern="1200" dirty="0">
+                          <a:solidFill>
+                            <a:schemeClr val="tx1"/>
+                          </a:solidFill>
+                          <a:effectLst/>
+                          <a:latin typeface="+mn-lt"/>
+                          <a:ea typeface="+mn-ea"/>
+                          <a:cs typeface="+mn-cs"/>
+                        </a:rPr>
+                        <a:t>Default Value</a:t>
+                      </a:r>
+                      <a:endParaRPr lang="en-US" sz="2400" b="1" dirty="0"/>
+                    </a:p>
+                  </a:txBody>
+                  <a:tcPr/>
+                </a:tc>
+                <a:extLst>
+                  <a:ext uri="{0D108BD9-81ED-4DB2-BD59-A6C34878D82A}">
+                    <a16:rowId xmlns:a16="http://schemas.microsoft.com/office/drawing/2014/main" val="411617698"/>
+                  </a:ext>
+                </a:extLst>
+              </a:tr>
+              <a:tr h="496954">
+                <a:tc>
+                  <a:txBody>
+                    <a:bodyPr/>
+                    <a:lstStyle/>
+                    <a:p>
+                      <a:pPr algn="ctr"/>
+                      <a:r>
+                        <a:rPr lang="en-US" sz="2200" dirty="0"/>
+                        <a:t>byte</a:t>
+                      </a:r>
+                    </a:p>
+                  </a:txBody>
+                  <a:tcPr/>
+                </a:tc>
+                <a:tc>
+                  <a:txBody>
+                    <a:bodyPr/>
+                    <a:lstStyle/>
+                    <a:p>
+                      <a:pPr algn="ctr"/>
+                      <a:r>
+                        <a:rPr lang="en-US" sz="2200" dirty="0"/>
+                        <a:t>8</a:t>
+                      </a:r>
+                    </a:p>
+                  </a:txBody>
+                  <a:tcPr/>
+                </a:tc>
+                <a:tc>
+                  <a:txBody>
+                    <a:bodyPr/>
+                    <a:lstStyle/>
+                    <a:p>
+                      <a:pPr algn="ctr"/>
+                      <a:r>
+                        <a:rPr lang="en-US" sz="2200" b="0" i="0" kern="1200" dirty="0">
+                          <a:solidFill>
+                            <a:schemeClr val="tx1"/>
+                          </a:solidFill>
+                          <a:effectLst/>
+                          <a:latin typeface="+mn-lt"/>
+                          <a:ea typeface="+mn-ea"/>
+                          <a:cs typeface="+mn-cs"/>
+                        </a:rPr>
+                        <a:t>-128 to 127</a:t>
+                      </a:r>
+                      <a:endParaRPr lang="en-US" sz="2200" dirty="0"/>
+                    </a:p>
+                  </a:txBody>
+                  <a:tcPr/>
+                </a:tc>
+                <a:tc>
+                  <a:txBody>
+                    <a:bodyPr/>
+                    <a:lstStyle/>
+                    <a:p>
+                      <a:pPr algn="ctr"/>
+                      <a:r>
+                        <a:rPr lang="en-US" sz="2400" dirty="0"/>
+                        <a:t>0</a:t>
+                      </a:r>
+                    </a:p>
+                  </a:txBody>
+                  <a:tcPr/>
+                </a:tc>
+                <a:extLst>
+                  <a:ext uri="{0D108BD9-81ED-4DB2-BD59-A6C34878D82A}">
+                    <a16:rowId xmlns:a16="http://schemas.microsoft.com/office/drawing/2014/main" val="2758190753"/>
+                  </a:ext>
+                </a:extLst>
+              </a:tr>
+              <a:tr h="496954">
+                <a:tc>
+                  <a:txBody>
+                    <a:bodyPr/>
+                    <a:lstStyle/>
+                    <a:p>
+                      <a:pPr algn="ctr"/>
+                      <a:r>
+                        <a:rPr lang="en-US" sz="2200" dirty="0"/>
+                        <a:t>short</a:t>
+                      </a:r>
+                    </a:p>
+                  </a:txBody>
+                  <a:tcPr/>
+                </a:tc>
+                <a:tc>
+                  <a:txBody>
+                    <a:bodyPr/>
+                    <a:lstStyle/>
+                    <a:p>
+                      <a:pPr algn="ctr"/>
+                      <a:r>
+                        <a:rPr lang="en-US" sz="2200" dirty="0"/>
+                        <a:t>16</a:t>
+                      </a:r>
+                    </a:p>
+                  </a:txBody>
+                  <a:tcPr/>
+                </a:tc>
+                <a:tc>
+                  <a:txBody>
+                    <a:bodyPr/>
+                    <a:lstStyle/>
+                    <a:p>
+                      <a:pPr algn="ctr"/>
+                      <a:r>
+                        <a:rPr lang="en-US" sz="2200" b="0" i="0" kern="1200" dirty="0">
+                          <a:solidFill>
+                            <a:schemeClr val="tx1"/>
+                          </a:solidFill>
+                          <a:effectLst/>
+                          <a:latin typeface="+mn-lt"/>
+                          <a:ea typeface="+mn-ea"/>
+                          <a:cs typeface="+mn-cs"/>
+                        </a:rPr>
+                        <a:t>-32,768 to 32,767</a:t>
+                      </a:r>
+                      <a:endParaRPr lang="en-US" sz="2200" dirty="0"/>
+                    </a:p>
+                  </a:txBody>
+                  <a:tcPr/>
+                </a:tc>
+                <a:tc>
+                  <a:txBody>
+                    <a:bodyPr/>
+                    <a:lstStyle/>
+                    <a:p>
+                      <a:pPr algn="ctr"/>
+                      <a:r>
+                        <a:rPr lang="en-US" sz="2400" dirty="0"/>
+                        <a:t>0</a:t>
+                      </a:r>
+                    </a:p>
+                  </a:txBody>
+                  <a:tcPr/>
+                </a:tc>
+                <a:extLst>
+                  <a:ext uri="{0D108BD9-81ED-4DB2-BD59-A6C34878D82A}">
+                    <a16:rowId xmlns:a16="http://schemas.microsoft.com/office/drawing/2014/main" val="1365920555"/>
+                  </a:ext>
+                </a:extLst>
+              </a:tr>
+              <a:tr h="564814">
+                <a:tc>
+                  <a:txBody>
+                    <a:bodyPr/>
+                    <a:lstStyle/>
+                    <a:p>
+                      <a:pPr algn="ctr"/>
+                      <a:r>
+                        <a:rPr lang="en-US" sz="2200" dirty="0"/>
+                        <a:t>int</a:t>
+                      </a:r>
+                    </a:p>
+                  </a:txBody>
+                  <a:tcPr/>
+                </a:tc>
+                <a:tc>
+                  <a:txBody>
+                    <a:bodyPr/>
+                    <a:lstStyle/>
+                    <a:p>
+                      <a:pPr algn="ctr"/>
+                      <a:r>
+                        <a:rPr lang="en-US" sz="2200" dirty="0"/>
+                        <a:t>32</a:t>
+                      </a:r>
+                    </a:p>
+                  </a:txBody>
+                  <a:tcPr/>
+                </a:tc>
+                <a:tc>
+                  <a:txBody>
+                    <a:bodyPr/>
+                    <a:lstStyle/>
+                    <a:p>
+                      <a:pPr algn="ctr"/>
+                      <a:r>
+                        <a:rPr lang="en-US" sz="2200" b="0" i="0" kern="1200" dirty="0">
+                          <a:solidFill>
+                            <a:schemeClr val="tx1"/>
+                          </a:solidFill>
+                          <a:effectLst/>
+                          <a:latin typeface="+mn-lt"/>
+                          <a:ea typeface="+mn-ea"/>
+                          <a:cs typeface="+mn-cs"/>
+                        </a:rPr>
+                        <a:t>-2,147,483,648 to 2,147,483,647</a:t>
+                      </a:r>
+                      <a:endParaRPr lang="en-US" sz="2200" dirty="0"/>
+                    </a:p>
+                  </a:txBody>
+                  <a:tcPr/>
+                </a:tc>
+                <a:tc>
+                  <a:txBody>
+                    <a:bodyPr/>
+                    <a:lstStyle/>
+                    <a:p>
+                      <a:pPr algn="ctr"/>
+                      <a:r>
+                        <a:rPr lang="en-US" sz="2400" dirty="0"/>
+                        <a:t>0</a:t>
+                      </a:r>
+                    </a:p>
+                  </a:txBody>
+                  <a:tcPr/>
+                </a:tc>
+                <a:extLst>
+                  <a:ext uri="{0D108BD9-81ED-4DB2-BD59-A6C34878D82A}">
+                    <a16:rowId xmlns:a16="http://schemas.microsoft.com/office/drawing/2014/main" val="2901399908"/>
+                  </a:ext>
+                </a:extLst>
+              </a:tr>
+              <a:tr h="496954">
+                <a:tc>
+                  <a:txBody>
+                    <a:bodyPr/>
+                    <a:lstStyle/>
+                    <a:p>
+                      <a:pPr algn="ctr"/>
+                      <a:r>
+                        <a:rPr lang="en-US" sz="2200" dirty="0"/>
+                        <a:t>long</a:t>
+                      </a:r>
+                    </a:p>
+                  </a:txBody>
+                  <a:tcPr/>
+                </a:tc>
+                <a:tc>
+                  <a:txBody>
+                    <a:bodyPr/>
+                    <a:lstStyle/>
+                    <a:p>
+                      <a:pPr algn="ctr"/>
+                      <a:r>
+                        <a:rPr lang="en-US" sz="2200" dirty="0"/>
+                        <a:t>64</a:t>
+                      </a:r>
+                    </a:p>
+                  </a:txBody>
+                  <a:tcPr/>
+                </a:tc>
+                <a:tc>
+                  <a:txBody>
+                    <a:bodyPr/>
+                    <a:lstStyle/>
+                    <a:p>
+                      <a:pPr algn="ctr"/>
+                      <a:r>
+                        <a:rPr lang="en-US" sz="2200" b="0" i="0" kern="1200" dirty="0">
+                          <a:solidFill>
+                            <a:schemeClr val="tx1"/>
+                          </a:solidFill>
+                          <a:effectLst/>
+                          <a:latin typeface="+mn-lt"/>
+                          <a:ea typeface="+mn-ea"/>
+                          <a:cs typeface="+mn-cs"/>
+                        </a:rPr>
+                        <a:t>-9,223,372,036,854,775,808 to 9,223,372,036,854,775,807</a:t>
+                      </a:r>
+                      <a:endParaRPr lang="en-US" sz="2200" dirty="0"/>
+                    </a:p>
+                  </a:txBody>
+                  <a:tcPr/>
+                </a:tc>
+                <a:tc>
+                  <a:txBody>
+                    <a:bodyPr/>
+                    <a:lstStyle/>
+                    <a:p>
+                      <a:pPr algn="ctr"/>
+                      <a:r>
+                        <a:rPr lang="en-US" sz="2400" dirty="0"/>
+                        <a:t>0L</a:t>
+                      </a:r>
+                    </a:p>
+                  </a:txBody>
+                  <a:tcPr/>
+                </a:tc>
+                <a:extLst>
+                  <a:ext uri="{0D108BD9-81ED-4DB2-BD59-A6C34878D82A}">
+                    <a16:rowId xmlns:a16="http://schemas.microsoft.com/office/drawing/2014/main" val="634189155"/>
+                  </a:ext>
+                </a:extLst>
+              </a:tr>
+              <a:tr h="496954">
+                <a:tc>
+                  <a:txBody>
+                    <a:bodyPr/>
+                    <a:lstStyle/>
+                    <a:p>
+                      <a:pPr algn="ctr"/>
+                      <a:r>
+                        <a:rPr lang="en-US" sz="2200" dirty="0"/>
+                        <a:t>float</a:t>
+                      </a:r>
+                    </a:p>
+                  </a:txBody>
+                  <a:tcPr/>
+                </a:tc>
+                <a:tc>
+                  <a:txBody>
+                    <a:bodyPr/>
+                    <a:lstStyle/>
+                    <a:p>
+                      <a:pPr algn="ctr"/>
+                      <a:r>
+                        <a:rPr lang="en-US" sz="2200" dirty="0"/>
+                        <a:t>32</a:t>
+                      </a:r>
+                    </a:p>
+                  </a:txBody>
+                  <a:tcPr/>
+                </a:tc>
+                <a:tc>
+                  <a:txBody>
+                    <a:bodyPr/>
+                    <a:lstStyle/>
+                    <a:p>
+                      <a:pPr algn="ctr"/>
+                      <a:r>
+                        <a:rPr lang="it-IT" sz="2200" b="0" i="0" kern="1200" dirty="0">
+                          <a:solidFill>
+                            <a:schemeClr val="tx1"/>
+                          </a:solidFill>
+                          <a:effectLst/>
+                          <a:latin typeface="+mn-lt"/>
+                          <a:ea typeface="+mn-ea"/>
+                          <a:cs typeface="+mn-cs"/>
+                        </a:rPr>
+                        <a:t>approx. 1.4e-45 to 3.4e+38</a:t>
+                      </a:r>
+                      <a:endParaRPr lang="en-US" sz="2200" dirty="0"/>
+                    </a:p>
+                  </a:txBody>
+                  <a:tcPr/>
+                </a:tc>
+                <a:tc>
+                  <a:txBody>
+                    <a:bodyPr/>
+                    <a:lstStyle/>
+                    <a:p>
+                      <a:pPr algn="ctr"/>
+                      <a:r>
+                        <a:rPr lang="en-US" sz="2400" dirty="0"/>
+                        <a:t>0.0f</a:t>
+                      </a:r>
+                    </a:p>
+                  </a:txBody>
+                  <a:tcPr/>
+                </a:tc>
+                <a:extLst>
+                  <a:ext uri="{0D108BD9-81ED-4DB2-BD59-A6C34878D82A}">
+                    <a16:rowId xmlns:a16="http://schemas.microsoft.com/office/drawing/2014/main" val="2090912432"/>
+                  </a:ext>
+                </a:extLst>
+              </a:tr>
+              <a:tr h="496954">
+                <a:tc>
+                  <a:txBody>
+                    <a:bodyPr/>
+                    <a:lstStyle/>
+                    <a:p>
+                      <a:pPr algn="ctr"/>
+                      <a:r>
+                        <a:rPr lang="en-US" sz="2200" dirty="0"/>
+                        <a:t>double</a:t>
+                      </a:r>
+                    </a:p>
+                  </a:txBody>
+                  <a:tcPr/>
+                </a:tc>
+                <a:tc>
+                  <a:txBody>
+                    <a:bodyPr/>
+                    <a:lstStyle/>
+                    <a:p>
+                      <a:pPr algn="ctr"/>
+                      <a:r>
+                        <a:rPr lang="en-US" sz="2200" dirty="0"/>
+                        <a:t>64</a:t>
+                      </a:r>
+                    </a:p>
+                  </a:txBody>
+                  <a:tcPr/>
+                </a:tc>
+                <a:tc>
+                  <a:txBody>
+                    <a:bodyPr/>
+                    <a:lstStyle/>
+                    <a:p>
+                      <a:pPr algn="ctr"/>
+                      <a:r>
+                        <a:rPr lang="it-IT" sz="2200" b="0" i="0" kern="1200" dirty="0">
+                          <a:solidFill>
+                            <a:schemeClr val="tx1"/>
+                          </a:solidFill>
+                          <a:effectLst/>
+                          <a:latin typeface="+mn-lt"/>
+                          <a:ea typeface="+mn-ea"/>
+                          <a:cs typeface="+mn-cs"/>
+                        </a:rPr>
+                        <a:t>approx. 4.9e-324 to 1.8e+308</a:t>
+                      </a:r>
+                      <a:endParaRPr lang="en-US" sz="2200" dirty="0"/>
+                    </a:p>
+                  </a:txBody>
+                  <a:tcPr/>
+                </a:tc>
+                <a:tc>
+                  <a:txBody>
+                    <a:bodyPr/>
+                    <a:lstStyle/>
+                    <a:p>
+                      <a:pPr algn="ctr"/>
+                      <a:r>
+                        <a:rPr lang="en-US" sz="2400" dirty="0"/>
+                        <a:t>0.0d</a:t>
+                      </a:r>
+                    </a:p>
+                  </a:txBody>
+                  <a:tcPr/>
+                </a:tc>
+                <a:extLst>
+                  <a:ext uri="{0D108BD9-81ED-4DB2-BD59-A6C34878D82A}">
+                    <a16:rowId xmlns:a16="http://schemas.microsoft.com/office/drawing/2014/main" val="2794764082"/>
+                  </a:ext>
+                </a:extLst>
+              </a:tr>
+              <a:tr h="496954">
+                <a:tc>
+                  <a:txBody>
+                    <a:bodyPr/>
+                    <a:lstStyle/>
+                    <a:p>
+                      <a:pPr algn="ctr"/>
+                      <a:r>
+                        <a:rPr lang="en-US" sz="2200" dirty="0"/>
+                        <a:t>char</a:t>
+                      </a:r>
+                    </a:p>
+                  </a:txBody>
+                  <a:tcPr/>
+                </a:tc>
+                <a:tc>
+                  <a:txBody>
+                    <a:bodyPr/>
+                    <a:lstStyle/>
+                    <a:p>
+                      <a:pPr algn="ctr"/>
+                      <a:r>
+                        <a:rPr lang="en-US" sz="2200" dirty="0"/>
+                        <a:t>16</a:t>
+                      </a:r>
+                    </a:p>
+                  </a:txBody>
+                  <a:tcPr/>
+                </a:tc>
+                <a:tc>
+                  <a:txBody>
+                    <a:bodyPr/>
+                    <a:lstStyle/>
+                    <a:p>
+                      <a:pPr algn="ctr"/>
+                      <a:r>
+                        <a:rPr lang="pl-PL" sz="2200" b="0" kern="1200" dirty="0">
+                          <a:solidFill>
+                            <a:schemeClr val="tx1"/>
+                          </a:solidFill>
+                          <a:effectLst/>
+                          <a:latin typeface="+mn-lt"/>
+                          <a:ea typeface="+mn-ea"/>
+                          <a:cs typeface="+mn-cs"/>
+                        </a:rPr>
+                        <a:t>'\u0000'</a:t>
+                      </a:r>
+                      <a:r>
+                        <a:rPr lang="pl-PL" sz="2200" b="0" i="0" kern="1200" dirty="0">
+                          <a:solidFill>
+                            <a:schemeClr val="tx1"/>
+                          </a:solidFill>
+                          <a:effectLst/>
+                          <a:latin typeface="+mn-lt"/>
+                          <a:ea typeface="+mn-ea"/>
+                          <a:cs typeface="+mn-cs"/>
+                        </a:rPr>
+                        <a:t> to </a:t>
+                      </a:r>
+                      <a:r>
+                        <a:rPr lang="pl-PL" sz="2200" b="0" kern="1200" dirty="0">
+                          <a:solidFill>
+                            <a:schemeClr val="tx1"/>
+                          </a:solidFill>
+                          <a:effectLst/>
+                          <a:latin typeface="+mn-lt"/>
+                          <a:ea typeface="+mn-ea"/>
+                          <a:cs typeface="+mn-cs"/>
+                        </a:rPr>
+                        <a:t>'\uffff'</a:t>
+                      </a:r>
+                      <a:r>
+                        <a:rPr lang="pl-PL" sz="2200" b="0" i="0" kern="1200" dirty="0">
+                          <a:solidFill>
+                            <a:schemeClr val="tx1"/>
+                          </a:solidFill>
+                          <a:effectLst/>
+                          <a:latin typeface="+mn-lt"/>
+                          <a:ea typeface="+mn-ea"/>
+                          <a:cs typeface="+mn-cs"/>
+                        </a:rPr>
+                        <a:t> (0 to 65,535)</a:t>
+                      </a:r>
+                      <a:endParaRPr lang="en-US" sz="2200" dirty="0"/>
+                    </a:p>
+                  </a:txBody>
+                  <a:tcPr/>
+                </a:tc>
+                <a:tc>
+                  <a:txBody>
+                    <a:bodyPr/>
+                    <a:lstStyle/>
+                    <a:p>
+                      <a:pPr algn="ctr"/>
+                      <a:r>
+                        <a:rPr lang="pl-PL" sz="2400" b="0" kern="1200" dirty="0">
+                          <a:solidFill>
+                            <a:schemeClr val="tx1"/>
+                          </a:solidFill>
+                          <a:effectLst/>
+                          <a:latin typeface="+mn-lt"/>
+                          <a:ea typeface="+mn-ea"/>
+                          <a:cs typeface="+mn-cs"/>
+                        </a:rPr>
+                        <a:t>'\u0000'</a:t>
+                      </a:r>
+                      <a:r>
+                        <a:rPr lang="pl-PL" sz="2400" b="0" i="0" kern="1200" dirty="0">
+                          <a:solidFill>
+                            <a:schemeClr val="tx1"/>
+                          </a:solidFill>
+                          <a:effectLst/>
+                          <a:latin typeface="+mn-lt"/>
+                          <a:ea typeface="+mn-ea"/>
+                          <a:cs typeface="+mn-cs"/>
+                        </a:rPr>
+                        <a:t> </a:t>
+                      </a:r>
+                      <a:endParaRPr lang="en-US" sz="2400" dirty="0"/>
+                    </a:p>
+                  </a:txBody>
+                  <a:tcPr/>
+                </a:tc>
+                <a:extLst>
+                  <a:ext uri="{0D108BD9-81ED-4DB2-BD59-A6C34878D82A}">
+                    <a16:rowId xmlns:a16="http://schemas.microsoft.com/office/drawing/2014/main" val="658045705"/>
+                  </a:ext>
+                </a:extLst>
+              </a:tr>
+              <a:tr h="451686">
+                <a:tc>
+                  <a:txBody>
+                    <a:bodyPr/>
+                    <a:lstStyle/>
+                    <a:p>
+                      <a:pPr algn="ctr"/>
+                      <a:r>
+                        <a:rPr lang="en-US" sz="2200" dirty="0" err="1"/>
+                        <a:t>boolean</a:t>
+                      </a:r>
+                      <a:endParaRPr lang="en-US" sz="2200" dirty="0"/>
+                    </a:p>
+                  </a:txBody>
+                  <a:tcPr/>
+                </a:tc>
+                <a:tc>
+                  <a:txBody>
+                    <a:bodyPr/>
+                    <a:lstStyle/>
+                    <a:p>
+                      <a:pPr algn="ctr"/>
+                      <a:r>
+                        <a:rPr lang="en-US" sz="2200" b="0" i="0" kern="1200" dirty="0">
+                          <a:solidFill>
+                            <a:schemeClr val="tx1"/>
+                          </a:solidFill>
+                          <a:effectLst/>
+                          <a:latin typeface="+mn-lt"/>
+                          <a:ea typeface="+mn-ea"/>
+                          <a:cs typeface="+mn-cs"/>
+                        </a:rPr>
+                        <a:t>JVM-dependent</a:t>
+                      </a:r>
+                      <a:endParaRPr lang="en-US" sz="2200" dirty="0"/>
+                    </a:p>
+                  </a:txBody>
+                  <a:tcPr/>
+                </a:tc>
+                <a:tc>
+                  <a:txBody>
+                    <a:bodyPr/>
+                    <a:lstStyle/>
+                    <a:p>
+                      <a:pPr algn="ctr"/>
+                      <a:r>
+                        <a:rPr lang="en-US" sz="2200" b="0" kern="1200" dirty="0">
+                          <a:solidFill>
+                            <a:schemeClr val="tx1"/>
+                          </a:solidFill>
+                          <a:effectLst/>
+                          <a:latin typeface="+mn-lt"/>
+                          <a:ea typeface="+mn-ea"/>
+                          <a:cs typeface="+mn-cs"/>
+                        </a:rPr>
+                        <a:t>true</a:t>
+                      </a:r>
+                      <a:r>
+                        <a:rPr lang="en-US" sz="2200" b="0" i="0" kern="1200" dirty="0">
+                          <a:solidFill>
+                            <a:schemeClr val="tx1"/>
+                          </a:solidFill>
+                          <a:effectLst/>
+                          <a:latin typeface="+mn-lt"/>
+                          <a:ea typeface="+mn-ea"/>
+                          <a:cs typeface="+mn-cs"/>
+                        </a:rPr>
+                        <a:t> or </a:t>
+                      </a:r>
+                      <a:r>
+                        <a:rPr lang="en-US" sz="2200" b="0" kern="1200" dirty="0">
+                          <a:solidFill>
+                            <a:schemeClr val="tx1"/>
+                          </a:solidFill>
+                          <a:effectLst/>
+                          <a:latin typeface="+mn-lt"/>
+                          <a:ea typeface="+mn-ea"/>
+                          <a:cs typeface="+mn-cs"/>
+                        </a:rPr>
+                        <a:t>false</a:t>
+                      </a:r>
+                      <a:endParaRPr lang="en-US" sz="2200" dirty="0"/>
+                    </a:p>
+                  </a:txBody>
+                  <a:tcPr/>
+                </a:tc>
+                <a:tc>
+                  <a:txBody>
+                    <a:bodyPr/>
+                    <a:lstStyle/>
+                    <a:p>
+                      <a:pPr algn="ctr"/>
+                      <a:r>
+                        <a:rPr lang="en-US" sz="2400" dirty="0"/>
+                        <a:t>false</a:t>
+                      </a:r>
+                    </a:p>
+                  </a:txBody>
+                  <a:tcPr/>
+                </a:tc>
+                <a:extLst>
+                  <a:ext uri="{0D108BD9-81ED-4DB2-BD59-A6C34878D82A}">
+                    <a16:rowId xmlns:a16="http://schemas.microsoft.com/office/drawing/2014/main" val="97682440"/>
+                  </a:ext>
+                </a:extLst>
+              </a:tr>
+            </a:tbl>
+          </a:graphicData>
+        </a:graphic>
+      </p:graphicFrame>
     </p:spTree>
     <p:extLst>
       <p:ext uri="{BB962C8B-B14F-4D97-AF65-F5344CB8AC3E}">
